--- a/public/fun/pack/pptx/reviewpro/보장점검양식프리미엄_14_부모님점검_네이비샴페인.pptx
+++ b/public/fun/pack/pptx/reviewpro/보장점검양식프리미엄_14_부모님점검_네이비샴페인.pptx
@@ -112,12 +112,12 @@
   <p:extLst>
     <p:ext uri="{521415D9-36F7-43E2-AB2F-B90AF26B5E84}">
       <p14:sectionLst xmlns:p14="http://schemas.microsoft.com/office/powerpoint/2010/main">
-        <p14:section name="시작" id="{90AC9CF8-1B97-4CD1-85C3-9A2366F24988}">
+        <p14:section name="시작" id="{370EBDE3-0086-4D12-8876-0B41F9886A22}">
           <p14:sldIdLst>
             <p14:sldId id="256"/>
           </p14:sldIdLst>
         </p14:section>
-        <p14:section name="본문" id="{5DCC598A-6E1A-4150-B233-B7E2F7CFD3E4}">
+        <p14:section name="본문" id="{75E2A1C8-8460-4B53-8EE7-D241E6C77C0E}">
           <p14:sldIdLst>
             <p14:sldId id="257"/>
             <p14:sldId id="258"/>
@@ -1643,7 +1643,7 @@
             </a:lvl1pPr>
           </a:lstStyle>
           <a:p>
-            <a:fld id="{CB569B4A-35FB-4B05-BA93-3365741C9935}" type="slidenum">
+            <a:fld id="{CB93936A-105A-4624-A343-3965B15FCD70}" type="slidenum">
               <a:rPr lang="en-US"/>
               <a:t>‹#›</a:t>
             </a:fld>
@@ -2718,7 +2718,7 @@
             </a:lvl1pPr>
           </a:lstStyle>
           <a:p>
-            <a:fld id="{2B74B0E5-FB3D-497A-AE22-5A5E8C9C9A75}" type="slidenum">
+            <a:fld id="{794D8990-8F45-438D-B1FF-85D575182979}" type="slidenum">
               <a:rPr lang="en-US"/>
               <a:t>‹#›</a:t>
             </a:fld>
@@ -3725,7 +3725,7 @@
             </a:lvl1pPr>
           </a:lstStyle>
           <a:p>
-            <a:fld id="{45CC97B8-F05E-4E95-80B9-2E2593457592}" type="slidenum">
+            <a:fld id="{1385C777-9DB2-4B17-A525-8D5AFC2D3C13}" type="slidenum">
               <a:rPr lang="en-US"/>
               <a:t>‹#›</a:t>
             </a:fld>
@@ -4866,7 +4866,7 @@
           <a:p>
             <a:r>
               <a:rPr lang="ko-KR"/>
-              <a:t>명절에 뵙고 증권 위치를 여쭤봅니다</a:t>
+              <a:t>뵐 때 증권 위치를 여쭤봅니다</a:t>
             </a:r>
           </a:p>
         </p:txBody>
@@ -4888,7 +4888,7 @@
           <a:p>
             <a:r>
               <a:rPr lang="ko-KR"/>
-              <a:t>부모님 점검 · 0000. 00. 00</a:t>
+              <a:t>부모님 점검 · 날짜 입력</a:t>
             </a:r>
           </a:p>
           <a:p>
@@ -4979,7 +4979,7 @@
           <a:bodyPr/>
           <a:lstStyle/>
           <a:p>
-            <a:fld id="{233A1D08-D5DB-482A-9E94-A9261B609823}" type="slidenum">
+            <a:fld id="{00DBB6B3-A319-474C-AB56-F8F497FD9E34}" type="slidenum">
               <a:rPr lang="en-US"/>
               <a:t>‹#›</a:t>
             </a:fld>
@@ -5692,7 +5692,7 @@
           <a:bodyPr/>
           <a:lstStyle/>
           <a:p>
-            <a:fld id="{C24B15E6-9826-4999-BCE8-28F74910ED9D}" type="slidenum">
+            <a:fld id="{D587DE9A-B48B-4F20-AB59-917A5FA048B4}" type="slidenum">
               <a:rPr lang="en-US"/>
               <a:t>‹#›</a:t>
             </a:fld>
@@ -7198,7 +7198,7 @@
           <a:bodyPr/>
           <a:lstStyle/>
           <a:p>
-            <a:fld id="{E9B87D1B-3861-4488-A83B-65F3C8D19F73}" type="slidenum">
+            <a:fld id="{FD2248A3-7D11-488E-AB40-56A632D41FEC}" type="slidenum">
               <a:rPr lang="en-US"/>
               <a:t>‹#›</a:t>
             </a:fld>
@@ -8748,7 +8748,7 @@
           <a:bodyPr/>
           <a:lstStyle/>
           <a:p>
-            <a:fld id="{15187209-4975-431C-A7B8-33A92ACE24E5}" type="slidenum">
+            <a:fld id="{9A2E8C9B-89CA-40B2-9A9D-7E2E899EE456}" type="slidenum">
               <a:rPr lang="en-US"/>
               <a:t>‹#›</a:t>
             </a:fld>
@@ -9610,7 +9610,7 @@
           <a:bodyPr/>
           <a:lstStyle/>
           <a:p>
-            <a:fld id="{9D76089F-4DB1-4D31-A984-4285FF86D352}" type="slidenum">
+            <a:fld id="{6860804A-1745-47C3-978A-61F39041B9E5}" type="slidenum">
               <a:rPr lang="en-US"/>
               <a:t>‹#›</a:t>
             </a:fld>
